--- a/Project4_Shelter_Simulation/Shelter_Simulation_Presentation.pptx
+++ b/Project4_Shelter_Simulation/Shelter_Simulation_Presentation.pptx
@@ -5860,7 +5860,7 @@
         <p:spPr>
           <a:xfrm>
             <a:off x="365760" y="1325880"/>
-            <a:ext cx="7772400" cy="3391593"/>
+            <a:ext cx="7772400" cy="3517408"/>
           </a:xfrm>
           <a:prstGeom prst="rect">
             <a:avLst/>
